--- a/dist/초5/국어/문학문법매체/초5_국어_문학문법매체_03_문장표현점검.pptx
+++ b/dist/초5/국어/문학문법매체/초5_국어_문학문법매체_03_문장표현점검.pptx
@@ -121,13 +121,13 @@
   <p:extLst>
     <p:ext uri="{521415D9-36F7-43E2-AB2F-B90AF26B5E84}">
       <p14:sectionLst xmlns:p14="http://schemas.microsoft.com/office/powerpoint/2010/main">
-        <p14:section name="도입" id="{0ffa8db0-0336-b872-64b4-8612aa4528c7}">
+        <p14:section name="도입" id="{722f30e9-9192-8376-13b9-d39db29ae095}">
           <p14:sldIdLst>
             <p14:sldId id="256"/>
             <p14:sldId id="257"/>
           </p14:sldIdLst>
         </p14:section>
-        <p14:section name="개념" id="{0d51707c-b7bc-5365-a1fa-6a0f5742f7eb}">
+        <p14:section name="개념" id="{1f76f4c8-0961-ff7e-078d-eb1706d76f1e}">
           <p14:sldIdLst>
             <p14:sldId id="258"/>
             <p14:sldId id="259"/>
@@ -136,26 +136,26 @@
             <p14:sldId id="262"/>
           </p14:sldIdLst>
         </p14:section>
-        <p14:section name="연습" id="{637be286-cfc0-cfc9-d319-e58f13f1513e}">
+        <p14:section name="연습" id="{f072aa33-f33a-2d79-9087-9ed2bb23ab48}">
           <p14:sldIdLst>
             <p14:sldId id="263"/>
             <p14:sldId id="264"/>
             <p14:sldId id="265"/>
           </p14:sldIdLst>
         </p14:section>
-        <p14:section name="확인" id="{d6ab9d26-edd5-e03f-bcfa-b82f07dc9170}">
+        <p14:section name="확인" id="{2c5016f2-8cf2-30a1-f3bd-2d79ece3bed4}">
           <p14:sldIdLst>
             <p14:sldId id="266"/>
             <p14:sldId id="267"/>
             <p14:sldId id="268"/>
           </p14:sldIdLst>
         </p14:section>
-        <p14:section name="정리" id="{68cf5235-25bc-9aeb-9518-d0f07d48fee3}">
+        <p14:section name="정리" id="{bb58757b-3da2-a394-a5ac-b29362dac639}">
           <p14:sldIdLst>
             <p14:sldId id="269"/>
           </p14:sldIdLst>
         </p14:section>
-        <p14:section name="보충" id="{7a9ef04a-dc0c-0ed2-91a0-04b31e738b3d}">
+        <p14:section name="보충" id="{369ec497-3afa-2759-dab2-405f685d6215}">
           <p14:sldIdLst>
             <p14:sldId id="270"/>
           </p14:sldIdLst>
@@ -7985,7 +7985,7 @@
           </p:nvPr>
         </p:nvGraphicFramePr>
         <p:xfrm>
-          <a:off x="1065276" y="2461260"/>
+          <a:off x="1065276" y="2429256"/>
           <a:ext cx="10058400" cy="914400"/>
         </p:xfrm>
         <a:graphic>
@@ -7997,7 +7997,7 @@
                 <a:gridCol w="3621024"/>
                 <a:gridCol w="3621024"/>
               </a:tblGrid>
-              <a:tr h="472440">
+              <a:tr h="481584">
                 <a:tc>
                   <a:txBody>
                     <a:bodyPr/>
@@ -8203,7 +8203,7 @@
                   </a:tcPr>
                 </a:tc>
               </a:tr>
-              <a:tr h="472440">
+              <a:tr h="481584">
                 <a:tc>
                   <a:txBody>
                     <a:bodyPr/>
@@ -8409,7 +8409,7 @@
                   </a:tcPr>
                 </a:tc>
               </a:tr>
-              <a:tr h="472440">
+              <a:tr h="481584">
                 <a:tc>
                   <a:txBody>
                     <a:bodyPr/>
@@ -8615,7 +8615,7 @@
                   </a:tcPr>
                 </a:tc>
               </a:tr>
-              <a:tr h="472440">
+              <a:tr h="481584">
                 <a:tc>
                   <a:txBody>
                     <a:bodyPr/>
@@ -8821,7 +8821,7 @@
                   </a:tcPr>
                 </a:tc>
               </a:tr>
-              <a:tr h="472440">
+              <a:tr h="481584">
                 <a:tc>
                   <a:txBody>
                     <a:bodyPr/>
@@ -9027,7 +9027,7 @@
                   </a:tcPr>
                 </a:tc>
               </a:tr>
-              <a:tr h="472440">
+              <a:tr h="481584">
                 <a:tc>
                   <a:txBody>
                     <a:bodyPr/>
@@ -9233,7 +9233,7 @@
                   </a:tcPr>
                 </a:tc>
               </a:tr>
-              <a:tr h="472440">
+              <a:tr h="481584">
                 <a:tc>
                   <a:txBody>
                     <a:bodyPr/>
@@ -9641,7 +9641,7 @@
           </p:nvPr>
         </p:nvGraphicFramePr>
         <p:xfrm>
-          <a:off x="608076" y="2042160"/>
+          <a:off x="608076" y="2019300"/>
           <a:ext cx="10972800" cy="914400"/>
         </p:xfrm>
         <a:graphic>
@@ -9652,7 +9652,7 @@
                 <a:gridCol w="5266944"/>
                 <a:gridCol w="5705856"/>
               </a:tblGrid>
-              <a:tr h="472440">
+              <a:tr h="481584">
                 <a:tc>
                   <a:txBody>
                     <a:bodyPr/>
@@ -9790,7 +9790,7 @@
                   </a:tcPr>
                 </a:tc>
               </a:tr>
-              <a:tr h="472440">
+              <a:tr h="481584">
                 <a:tc>
                   <a:txBody>
                     <a:bodyPr/>
@@ -9928,7 +9928,7 @@
                   </a:tcPr>
                 </a:tc>
               </a:tr>
-              <a:tr h="472440">
+              <a:tr h="481584">
                 <a:tc>
                   <a:txBody>
                     <a:bodyPr/>
@@ -10066,7 +10066,7 @@
                   </a:tcPr>
                 </a:tc>
               </a:tr>
-              <a:tr h="472440">
+              <a:tr h="481584">
                 <a:tc>
                   <a:txBody>
                     <a:bodyPr/>
@@ -10204,7 +10204,7 @@
                   </a:tcPr>
                 </a:tc>
               </a:tr>
-              <a:tr h="472440">
+              <a:tr h="481584">
                 <a:tc>
                   <a:txBody>
                     <a:bodyPr/>
@@ -11153,7 +11153,7 @@
           </p:nvPr>
         </p:nvGraphicFramePr>
         <p:xfrm>
-          <a:off x="608076" y="2278380"/>
+          <a:off x="608076" y="2260092"/>
           <a:ext cx="10972800" cy="914400"/>
         </p:xfrm>
         <a:graphic>
@@ -11164,7 +11164,7 @@
                 <a:gridCol w="5486400"/>
                 <a:gridCol w="5486400"/>
               </a:tblGrid>
-              <a:tr h="472440">
+              <a:tr h="481584">
                 <a:tc>
                   <a:txBody>
                     <a:bodyPr/>
@@ -11302,7 +11302,7 @@
                   </a:tcPr>
                 </a:tc>
               </a:tr>
-              <a:tr h="472440">
+              <a:tr h="481584">
                 <a:tc>
                   <a:txBody>
                     <a:bodyPr/>
@@ -11440,7 +11440,7 @@
                   </a:tcPr>
                 </a:tc>
               </a:tr>
-              <a:tr h="472440">
+              <a:tr h="481584">
                 <a:tc>
                   <a:txBody>
                     <a:bodyPr/>
@@ -11578,7 +11578,7 @@
                   </a:tcPr>
                 </a:tc>
               </a:tr>
-              <a:tr h="472440">
+              <a:tr h="481584">
                 <a:tc>
                   <a:txBody>
                     <a:bodyPr/>
